--- a/這世代(崇拜版).pptx
+++ b/這世代(崇拜版).pptx
@@ -168,10 +168,9 @@
           <a:lstStyle/>
           <a:p>
             <a:r>
-              <a:rPr lang="zh-TW" altLang="en-US" smtClean="0"/>
+              <a:rPr lang="zh-TW" altLang="en-US"/>
               <a:t>按一下以編輯母片標題樣式</a:t>
             </a:r>
-            <a:endParaRPr lang="zh-TW" altLang="en-US"/>
           </a:p>
         </p:txBody>
       </p:sp>
@@ -287,10 +286,9 @@
           </a:lstStyle>
           <a:p>
             <a:r>
-              <a:rPr lang="zh-TW" altLang="en-US" smtClean="0"/>
+              <a:rPr lang="zh-TW" altLang="en-US"/>
               <a:t>按一下以編輯母片副標題樣式</a:t>
             </a:r>
-            <a:endParaRPr lang="zh-TW" altLang="en-US"/>
           </a:p>
         </p:txBody>
       </p:sp>
@@ -311,7 +309,7 @@
           <a:p>
             <a:fld id="{70F2B8A8-1C9A-4543-B952-67A8D415A7CB}" type="datetimeFigureOut">
               <a:rPr lang="zh-TW" altLang="en-US" smtClean="0"/>
-              <a:t>2022/1/1</a:t>
+              <a:t>2025/9/20</a:t>
             </a:fld>
             <a:endParaRPr lang="zh-TW" altLang="en-US"/>
           </a:p>
@@ -400,10 +398,9 @@
           <a:lstStyle/>
           <a:p>
             <a:r>
-              <a:rPr lang="zh-TW" altLang="en-US" smtClean="0"/>
+              <a:rPr lang="zh-TW" altLang="en-US"/>
               <a:t>按一下以編輯母片標題樣式</a:t>
             </a:r>
-            <a:endParaRPr lang="zh-TW" altLang="en-US"/>
           </a:p>
         </p:txBody>
       </p:sp>
@@ -424,38 +421,37 @@
           <a:p>
             <a:pPr lvl="0"/>
             <a:r>
-              <a:rPr lang="zh-TW" altLang="en-US" smtClean="0"/>
+              <a:rPr lang="zh-TW" altLang="en-US"/>
               <a:t>按一下以編輯母片文字樣式</a:t>
             </a:r>
           </a:p>
           <a:p>
             <a:pPr lvl="1"/>
             <a:r>
-              <a:rPr lang="zh-TW" altLang="en-US" smtClean="0"/>
+              <a:rPr lang="zh-TW" altLang="en-US"/>
               <a:t>第二層</a:t>
             </a:r>
           </a:p>
           <a:p>
             <a:pPr lvl="2"/>
             <a:r>
-              <a:rPr lang="zh-TW" altLang="en-US" smtClean="0"/>
+              <a:rPr lang="zh-TW" altLang="en-US"/>
               <a:t>第三層</a:t>
             </a:r>
           </a:p>
           <a:p>
             <a:pPr lvl="3"/>
             <a:r>
-              <a:rPr lang="zh-TW" altLang="en-US" smtClean="0"/>
+              <a:rPr lang="zh-TW" altLang="en-US"/>
               <a:t>第四層</a:t>
             </a:r>
           </a:p>
           <a:p>
             <a:pPr lvl="4"/>
             <a:r>
-              <a:rPr lang="zh-TW" altLang="en-US" smtClean="0"/>
+              <a:rPr lang="zh-TW" altLang="en-US"/>
               <a:t>第五層</a:t>
             </a:r>
-            <a:endParaRPr lang="zh-TW" altLang="en-US"/>
           </a:p>
         </p:txBody>
       </p:sp>
@@ -476,7 +472,7 @@
           <a:p>
             <a:fld id="{70F2B8A8-1C9A-4543-B952-67A8D415A7CB}" type="datetimeFigureOut">
               <a:rPr lang="zh-TW" altLang="en-US" smtClean="0"/>
-              <a:t>2022/1/1</a:t>
+              <a:t>2025/9/20</a:t>
             </a:fld>
             <a:endParaRPr lang="zh-TW" altLang="en-US"/>
           </a:p>
@@ -570,10 +566,9 @@
           <a:lstStyle/>
           <a:p>
             <a:r>
-              <a:rPr lang="zh-TW" altLang="en-US" smtClean="0"/>
+              <a:rPr lang="zh-TW" altLang="en-US"/>
               <a:t>按一下以編輯母片標題樣式</a:t>
             </a:r>
-            <a:endParaRPr lang="zh-TW" altLang="en-US"/>
           </a:p>
         </p:txBody>
       </p:sp>
@@ -599,38 +594,37 @@
           <a:p>
             <a:pPr lvl="0"/>
             <a:r>
-              <a:rPr lang="zh-TW" altLang="en-US" smtClean="0"/>
+              <a:rPr lang="zh-TW" altLang="en-US"/>
               <a:t>按一下以編輯母片文字樣式</a:t>
             </a:r>
           </a:p>
           <a:p>
             <a:pPr lvl="1"/>
             <a:r>
-              <a:rPr lang="zh-TW" altLang="en-US" smtClean="0"/>
+              <a:rPr lang="zh-TW" altLang="en-US"/>
               <a:t>第二層</a:t>
             </a:r>
           </a:p>
           <a:p>
             <a:pPr lvl="2"/>
             <a:r>
-              <a:rPr lang="zh-TW" altLang="en-US" smtClean="0"/>
+              <a:rPr lang="zh-TW" altLang="en-US"/>
               <a:t>第三層</a:t>
             </a:r>
           </a:p>
           <a:p>
             <a:pPr lvl="3"/>
             <a:r>
-              <a:rPr lang="zh-TW" altLang="en-US" smtClean="0"/>
+              <a:rPr lang="zh-TW" altLang="en-US"/>
               <a:t>第四層</a:t>
             </a:r>
           </a:p>
           <a:p>
             <a:pPr lvl="4"/>
             <a:r>
-              <a:rPr lang="zh-TW" altLang="en-US" smtClean="0"/>
+              <a:rPr lang="zh-TW" altLang="en-US"/>
               <a:t>第五層</a:t>
             </a:r>
-            <a:endParaRPr lang="zh-TW" altLang="en-US"/>
           </a:p>
         </p:txBody>
       </p:sp>
@@ -651,7 +645,7 @@
           <a:p>
             <a:fld id="{70F2B8A8-1C9A-4543-B952-67A8D415A7CB}" type="datetimeFigureOut">
               <a:rPr lang="zh-TW" altLang="en-US" smtClean="0"/>
-              <a:t>2022/1/1</a:t>
+              <a:t>2025/9/20</a:t>
             </a:fld>
             <a:endParaRPr lang="zh-TW" altLang="en-US"/>
           </a:p>
@@ -740,10 +734,9 @@
           <a:lstStyle/>
           <a:p>
             <a:r>
-              <a:rPr lang="zh-TW" altLang="en-US" smtClean="0"/>
+              <a:rPr lang="zh-TW" altLang="en-US"/>
               <a:t>按一下以編輯母片標題樣式</a:t>
             </a:r>
-            <a:endParaRPr lang="zh-TW" altLang="en-US"/>
           </a:p>
         </p:txBody>
       </p:sp>
@@ -764,38 +757,37 @@
           <a:p>
             <a:pPr lvl="0"/>
             <a:r>
-              <a:rPr lang="zh-TW" altLang="en-US" smtClean="0"/>
+              <a:rPr lang="zh-TW" altLang="en-US"/>
               <a:t>按一下以編輯母片文字樣式</a:t>
             </a:r>
           </a:p>
           <a:p>
             <a:pPr lvl="1"/>
             <a:r>
-              <a:rPr lang="zh-TW" altLang="en-US" smtClean="0"/>
+              <a:rPr lang="zh-TW" altLang="en-US"/>
               <a:t>第二層</a:t>
             </a:r>
           </a:p>
           <a:p>
             <a:pPr lvl="2"/>
             <a:r>
-              <a:rPr lang="zh-TW" altLang="en-US" smtClean="0"/>
+              <a:rPr lang="zh-TW" altLang="en-US"/>
               <a:t>第三層</a:t>
             </a:r>
           </a:p>
           <a:p>
             <a:pPr lvl="3"/>
             <a:r>
-              <a:rPr lang="zh-TW" altLang="en-US" smtClean="0"/>
+              <a:rPr lang="zh-TW" altLang="en-US"/>
               <a:t>第四層</a:t>
             </a:r>
           </a:p>
           <a:p>
             <a:pPr lvl="4"/>
             <a:r>
-              <a:rPr lang="zh-TW" altLang="en-US" smtClean="0"/>
+              <a:rPr lang="zh-TW" altLang="en-US"/>
               <a:t>第五層</a:t>
             </a:r>
-            <a:endParaRPr lang="zh-TW" altLang="en-US"/>
           </a:p>
         </p:txBody>
       </p:sp>
@@ -816,7 +808,7 @@
           <a:p>
             <a:fld id="{70F2B8A8-1C9A-4543-B952-67A8D415A7CB}" type="datetimeFigureOut">
               <a:rPr lang="zh-TW" altLang="en-US" smtClean="0"/>
-              <a:t>2022/1/1</a:t>
+              <a:t>2025/9/20</a:t>
             </a:fld>
             <a:endParaRPr lang="zh-TW" altLang="en-US"/>
           </a:p>
@@ -914,10 +906,9 @@
           </a:lstStyle>
           <a:p>
             <a:r>
-              <a:rPr lang="zh-TW" altLang="en-US" smtClean="0"/>
+              <a:rPr lang="zh-TW" altLang="en-US"/>
               <a:t>按一下以編輯母片標題樣式</a:t>
             </a:r>
-            <a:endParaRPr lang="zh-TW" altLang="en-US"/>
           </a:p>
         </p:txBody>
       </p:sp>
@@ -1034,7 +1025,7 @@
           <a:p>
             <a:pPr lvl="0"/>
             <a:r>
-              <a:rPr lang="zh-TW" altLang="en-US" smtClean="0"/>
+              <a:rPr lang="zh-TW" altLang="en-US"/>
               <a:t>按一下以編輯母片文字樣式</a:t>
             </a:r>
           </a:p>
@@ -1057,7 +1048,7 @@
           <a:p>
             <a:fld id="{70F2B8A8-1C9A-4543-B952-67A8D415A7CB}" type="datetimeFigureOut">
               <a:rPr lang="zh-TW" altLang="en-US" smtClean="0"/>
-              <a:t>2022/1/1</a:t>
+              <a:t>2025/9/20</a:t>
             </a:fld>
             <a:endParaRPr lang="zh-TW" altLang="en-US"/>
           </a:p>
@@ -1146,10 +1137,9 @@
           <a:lstStyle/>
           <a:p>
             <a:r>
-              <a:rPr lang="zh-TW" altLang="en-US" smtClean="0"/>
+              <a:rPr lang="zh-TW" altLang="en-US"/>
               <a:t>按一下以編輯母片標題樣式</a:t>
             </a:r>
-            <a:endParaRPr lang="zh-TW" altLang="en-US"/>
           </a:p>
         </p:txBody>
       </p:sp>
@@ -1203,38 +1193,37 @@
           <a:p>
             <a:pPr lvl="0"/>
             <a:r>
-              <a:rPr lang="zh-TW" altLang="en-US" smtClean="0"/>
+              <a:rPr lang="zh-TW" altLang="en-US"/>
               <a:t>按一下以編輯母片文字樣式</a:t>
             </a:r>
           </a:p>
           <a:p>
             <a:pPr lvl="1"/>
             <a:r>
-              <a:rPr lang="zh-TW" altLang="en-US" smtClean="0"/>
+              <a:rPr lang="zh-TW" altLang="en-US"/>
               <a:t>第二層</a:t>
             </a:r>
           </a:p>
           <a:p>
             <a:pPr lvl="2"/>
             <a:r>
-              <a:rPr lang="zh-TW" altLang="en-US" smtClean="0"/>
+              <a:rPr lang="zh-TW" altLang="en-US"/>
               <a:t>第三層</a:t>
             </a:r>
           </a:p>
           <a:p>
             <a:pPr lvl="3"/>
             <a:r>
-              <a:rPr lang="zh-TW" altLang="en-US" smtClean="0"/>
+              <a:rPr lang="zh-TW" altLang="en-US"/>
               <a:t>第四層</a:t>
             </a:r>
           </a:p>
           <a:p>
             <a:pPr lvl="4"/>
             <a:r>
-              <a:rPr lang="zh-TW" altLang="en-US" smtClean="0"/>
+              <a:rPr lang="zh-TW" altLang="en-US"/>
               <a:t>第五層</a:t>
             </a:r>
-            <a:endParaRPr lang="zh-TW" altLang="en-US"/>
           </a:p>
         </p:txBody>
       </p:sp>
@@ -1288,38 +1277,37 @@
           <a:p>
             <a:pPr lvl="0"/>
             <a:r>
-              <a:rPr lang="zh-TW" altLang="en-US" smtClean="0"/>
+              <a:rPr lang="zh-TW" altLang="en-US"/>
               <a:t>按一下以編輯母片文字樣式</a:t>
             </a:r>
           </a:p>
           <a:p>
             <a:pPr lvl="1"/>
             <a:r>
-              <a:rPr lang="zh-TW" altLang="en-US" smtClean="0"/>
+              <a:rPr lang="zh-TW" altLang="en-US"/>
               <a:t>第二層</a:t>
             </a:r>
           </a:p>
           <a:p>
             <a:pPr lvl="2"/>
             <a:r>
-              <a:rPr lang="zh-TW" altLang="en-US" smtClean="0"/>
+              <a:rPr lang="zh-TW" altLang="en-US"/>
               <a:t>第三層</a:t>
             </a:r>
           </a:p>
           <a:p>
             <a:pPr lvl="3"/>
             <a:r>
-              <a:rPr lang="zh-TW" altLang="en-US" smtClean="0"/>
+              <a:rPr lang="zh-TW" altLang="en-US"/>
               <a:t>第四層</a:t>
             </a:r>
           </a:p>
           <a:p>
             <a:pPr lvl="4"/>
             <a:r>
-              <a:rPr lang="zh-TW" altLang="en-US" smtClean="0"/>
+              <a:rPr lang="zh-TW" altLang="en-US"/>
               <a:t>第五層</a:t>
             </a:r>
-            <a:endParaRPr lang="zh-TW" altLang="en-US"/>
           </a:p>
         </p:txBody>
       </p:sp>
@@ -1340,7 +1328,7 @@
           <a:p>
             <a:fld id="{70F2B8A8-1C9A-4543-B952-67A8D415A7CB}" type="datetimeFigureOut">
               <a:rPr lang="zh-TW" altLang="en-US" smtClean="0"/>
-              <a:t>2022/1/1</a:t>
+              <a:t>2025/9/20</a:t>
             </a:fld>
             <a:endParaRPr lang="zh-TW" altLang="en-US"/>
           </a:p>
@@ -1433,10 +1421,9 @@
           </a:lstStyle>
           <a:p>
             <a:r>
-              <a:rPr lang="zh-TW" altLang="en-US" smtClean="0"/>
+              <a:rPr lang="zh-TW" altLang="en-US"/>
               <a:t>按一下以編輯母片標題樣式</a:t>
             </a:r>
-            <a:endParaRPr lang="zh-TW" altLang="en-US"/>
           </a:p>
         </p:txBody>
       </p:sp>
@@ -1499,7 +1486,7 @@
           <a:p>
             <a:pPr lvl="0"/>
             <a:r>
-              <a:rPr lang="zh-TW" altLang="en-US" smtClean="0"/>
+              <a:rPr lang="zh-TW" altLang="en-US"/>
               <a:t>按一下以編輯母片文字樣式</a:t>
             </a:r>
           </a:p>
@@ -1555,38 +1542,37 @@
           <a:p>
             <a:pPr lvl="0"/>
             <a:r>
-              <a:rPr lang="zh-TW" altLang="en-US" smtClean="0"/>
+              <a:rPr lang="zh-TW" altLang="en-US"/>
               <a:t>按一下以編輯母片文字樣式</a:t>
             </a:r>
           </a:p>
           <a:p>
             <a:pPr lvl="1"/>
             <a:r>
-              <a:rPr lang="zh-TW" altLang="en-US" smtClean="0"/>
+              <a:rPr lang="zh-TW" altLang="en-US"/>
               <a:t>第二層</a:t>
             </a:r>
           </a:p>
           <a:p>
             <a:pPr lvl="2"/>
             <a:r>
-              <a:rPr lang="zh-TW" altLang="en-US" smtClean="0"/>
+              <a:rPr lang="zh-TW" altLang="en-US"/>
               <a:t>第三層</a:t>
             </a:r>
           </a:p>
           <a:p>
             <a:pPr lvl="3"/>
             <a:r>
-              <a:rPr lang="zh-TW" altLang="en-US" smtClean="0"/>
+              <a:rPr lang="zh-TW" altLang="en-US"/>
               <a:t>第四層</a:t>
             </a:r>
           </a:p>
           <a:p>
             <a:pPr lvl="4"/>
             <a:r>
-              <a:rPr lang="zh-TW" altLang="en-US" smtClean="0"/>
+              <a:rPr lang="zh-TW" altLang="en-US"/>
               <a:t>第五層</a:t>
             </a:r>
-            <a:endParaRPr lang="zh-TW" altLang="en-US"/>
           </a:p>
         </p:txBody>
       </p:sp>
@@ -1649,7 +1635,7 @@
           <a:p>
             <a:pPr lvl="0"/>
             <a:r>
-              <a:rPr lang="zh-TW" altLang="en-US" smtClean="0"/>
+              <a:rPr lang="zh-TW" altLang="en-US"/>
               <a:t>按一下以編輯母片文字樣式</a:t>
             </a:r>
           </a:p>
@@ -1705,38 +1691,37 @@
           <a:p>
             <a:pPr lvl="0"/>
             <a:r>
-              <a:rPr lang="zh-TW" altLang="en-US" smtClean="0"/>
+              <a:rPr lang="zh-TW" altLang="en-US"/>
               <a:t>按一下以編輯母片文字樣式</a:t>
             </a:r>
           </a:p>
           <a:p>
             <a:pPr lvl="1"/>
             <a:r>
-              <a:rPr lang="zh-TW" altLang="en-US" smtClean="0"/>
+              <a:rPr lang="zh-TW" altLang="en-US"/>
               <a:t>第二層</a:t>
             </a:r>
           </a:p>
           <a:p>
             <a:pPr lvl="2"/>
             <a:r>
-              <a:rPr lang="zh-TW" altLang="en-US" smtClean="0"/>
+              <a:rPr lang="zh-TW" altLang="en-US"/>
               <a:t>第三層</a:t>
             </a:r>
           </a:p>
           <a:p>
             <a:pPr lvl="3"/>
             <a:r>
-              <a:rPr lang="zh-TW" altLang="en-US" smtClean="0"/>
+              <a:rPr lang="zh-TW" altLang="en-US"/>
               <a:t>第四層</a:t>
             </a:r>
           </a:p>
           <a:p>
             <a:pPr lvl="4"/>
             <a:r>
-              <a:rPr lang="zh-TW" altLang="en-US" smtClean="0"/>
+              <a:rPr lang="zh-TW" altLang="en-US"/>
               <a:t>第五層</a:t>
             </a:r>
-            <a:endParaRPr lang="zh-TW" altLang="en-US"/>
           </a:p>
         </p:txBody>
       </p:sp>
@@ -1757,7 +1742,7 @@
           <a:p>
             <a:fld id="{70F2B8A8-1C9A-4543-B952-67A8D415A7CB}" type="datetimeFigureOut">
               <a:rPr lang="zh-TW" altLang="en-US" smtClean="0"/>
-              <a:t>2022/1/1</a:t>
+              <a:t>2025/9/20</a:t>
             </a:fld>
             <a:endParaRPr lang="zh-TW" altLang="en-US"/>
           </a:p>
@@ -1846,10 +1831,9 @@
           <a:lstStyle/>
           <a:p>
             <a:r>
-              <a:rPr lang="zh-TW" altLang="en-US" smtClean="0"/>
+              <a:rPr lang="zh-TW" altLang="en-US"/>
               <a:t>按一下以編輯母片標題樣式</a:t>
             </a:r>
-            <a:endParaRPr lang="zh-TW" altLang="en-US"/>
           </a:p>
         </p:txBody>
       </p:sp>
@@ -1870,7 +1854,7 @@
           <a:p>
             <a:fld id="{70F2B8A8-1C9A-4543-B952-67A8D415A7CB}" type="datetimeFigureOut">
               <a:rPr lang="zh-TW" altLang="en-US" smtClean="0"/>
-              <a:t>2022/1/1</a:t>
+              <a:t>2025/9/20</a:t>
             </a:fld>
             <a:endParaRPr lang="zh-TW" altLang="en-US"/>
           </a:p>
@@ -1960,7 +1944,7 @@
           <a:p>
             <a:fld id="{70F2B8A8-1C9A-4543-B952-67A8D415A7CB}" type="datetimeFigureOut">
               <a:rPr lang="zh-TW" altLang="en-US" smtClean="0"/>
-              <a:t>2022/1/1</a:t>
+              <a:t>2025/9/20</a:t>
             </a:fld>
             <a:endParaRPr lang="zh-TW" altLang="en-US"/>
           </a:p>
@@ -2058,10 +2042,9 @@
           </a:lstStyle>
           <a:p>
             <a:r>
-              <a:rPr lang="zh-TW" altLang="en-US" smtClean="0"/>
+              <a:rPr lang="zh-TW" altLang="en-US"/>
               <a:t>按一下以編輯母片標題樣式</a:t>
             </a:r>
-            <a:endParaRPr lang="zh-TW" altLang="en-US"/>
           </a:p>
         </p:txBody>
       </p:sp>
@@ -2115,38 +2098,37 @@
           <a:p>
             <a:pPr lvl="0"/>
             <a:r>
-              <a:rPr lang="zh-TW" altLang="en-US" smtClean="0"/>
+              <a:rPr lang="zh-TW" altLang="en-US"/>
               <a:t>按一下以編輯母片文字樣式</a:t>
             </a:r>
           </a:p>
           <a:p>
             <a:pPr lvl="1"/>
             <a:r>
-              <a:rPr lang="zh-TW" altLang="en-US" smtClean="0"/>
+              <a:rPr lang="zh-TW" altLang="en-US"/>
               <a:t>第二層</a:t>
             </a:r>
           </a:p>
           <a:p>
             <a:pPr lvl="2"/>
             <a:r>
-              <a:rPr lang="zh-TW" altLang="en-US" smtClean="0"/>
+              <a:rPr lang="zh-TW" altLang="en-US"/>
               <a:t>第三層</a:t>
             </a:r>
           </a:p>
           <a:p>
             <a:pPr lvl="3"/>
             <a:r>
-              <a:rPr lang="zh-TW" altLang="en-US" smtClean="0"/>
+              <a:rPr lang="zh-TW" altLang="en-US"/>
               <a:t>第四層</a:t>
             </a:r>
           </a:p>
           <a:p>
             <a:pPr lvl="4"/>
             <a:r>
-              <a:rPr lang="zh-TW" altLang="en-US" smtClean="0"/>
+              <a:rPr lang="zh-TW" altLang="en-US"/>
               <a:t>第五層</a:t>
             </a:r>
-            <a:endParaRPr lang="zh-TW" altLang="en-US"/>
           </a:p>
         </p:txBody>
       </p:sp>
@@ -2209,7 +2191,7 @@
           <a:p>
             <a:pPr lvl="0"/>
             <a:r>
-              <a:rPr lang="zh-TW" altLang="en-US" smtClean="0"/>
+              <a:rPr lang="zh-TW" altLang="en-US"/>
               <a:t>按一下以編輯母片文字樣式</a:t>
             </a:r>
           </a:p>
@@ -2232,7 +2214,7 @@
           <a:p>
             <a:fld id="{70F2B8A8-1C9A-4543-B952-67A8D415A7CB}" type="datetimeFigureOut">
               <a:rPr lang="zh-TW" altLang="en-US" smtClean="0"/>
-              <a:t>2022/1/1</a:t>
+              <a:t>2025/9/20</a:t>
             </a:fld>
             <a:endParaRPr lang="zh-TW" altLang="en-US"/>
           </a:p>
@@ -2330,10 +2312,9 @@
           </a:lstStyle>
           <a:p>
             <a:r>
-              <a:rPr lang="zh-TW" altLang="en-US" smtClean="0"/>
+              <a:rPr lang="zh-TW" altLang="en-US"/>
               <a:t>按一下以編輯母片標題樣式</a:t>
             </a:r>
-            <a:endParaRPr lang="zh-TW" altLang="en-US"/>
           </a:p>
         </p:txBody>
       </p:sp>
@@ -2395,10 +2376,9 @@
           </a:lstStyle>
           <a:p>
             <a:r>
-              <a:rPr lang="zh-TW" altLang="en-US" smtClean="0"/>
+              <a:rPr lang="zh-TW" altLang="en-US"/>
               <a:t>按一下圖示以新增圖片</a:t>
             </a:r>
-            <a:endParaRPr lang="zh-TW" altLang="en-US"/>
           </a:p>
         </p:txBody>
       </p:sp>
@@ -2461,7 +2441,7 @@
           <a:p>
             <a:pPr lvl="0"/>
             <a:r>
-              <a:rPr lang="zh-TW" altLang="en-US" smtClean="0"/>
+              <a:rPr lang="zh-TW" altLang="en-US"/>
               <a:t>按一下以編輯母片文字樣式</a:t>
             </a:r>
           </a:p>
@@ -2484,7 +2464,7 @@
           <a:p>
             <a:fld id="{70F2B8A8-1C9A-4543-B952-67A8D415A7CB}" type="datetimeFigureOut">
               <a:rPr lang="zh-TW" altLang="en-US" smtClean="0"/>
-              <a:t>2022/1/1</a:t>
+              <a:t>2025/9/20</a:t>
             </a:fld>
             <a:endParaRPr lang="zh-TW" altLang="en-US"/>
           </a:p>
@@ -2593,10 +2573,9 @@
           <a:lstStyle/>
           <a:p>
             <a:r>
-              <a:rPr lang="zh-TW" altLang="en-US" smtClean="0"/>
+              <a:rPr lang="zh-TW" altLang="en-US"/>
               <a:t>按一下以編輯母片標題樣式</a:t>
             </a:r>
-            <a:endParaRPr lang="zh-TW" altLang="en-US"/>
           </a:p>
         </p:txBody>
       </p:sp>
@@ -2627,38 +2606,37 @@
           <a:p>
             <a:pPr lvl="0"/>
             <a:r>
-              <a:rPr lang="zh-TW" altLang="en-US" smtClean="0"/>
+              <a:rPr lang="zh-TW" altLang="en-US"/>
               <a:t>按一下以編輯母片文字樣式</a:t>
             </a:r>
           </a:p>
           <a:p>
             <a:pPr lvl="1"/>
             <a:r>
-              <a:rPr lang="zh-TW" altLang="en-US" smtClean="0"/>
+              <a:rPr lang="zh-TW" altLang="en-US"/>
               <a:t>第二層</a:t>
             </a:r>
           </a:p>
           <a:p>
             <a:pPr lvl="2"/>
             <a:r>
-              <a:rPr lang="zh-TW" altLang="en-US" smtClean="0"/>
+              <a:rPr lang="zh-TW" altLang="en-US"/>
               <a:t>第三層</a:t>
             </a:r>
           </a:p>
           <a:p>
             <a:pPr lvl="3"/>
             <a:r>
-              <a:rPr lang="zh-TW" altLang="en-US" smtClean="0"/>
+              <a:rPr lang="zh-TW" altLang="en-US"/>
               <a:t>第四層</a:t>
             </a:r>
           </a:p>
           <a:p>
             <a:pPr lvl="4"/>
             <a:r>
-              <a:rPr lang="zh-TW" altLang="en-US" smtClean="0"/>
+              <a:rPr lang="zh-TW" altLang="en-US"/>
               <a:t>第五層</a:t>
             </a:r>
-            <a:endParaRPr lang="zh-TW" altLang="en-US"/>
           </a:p>
         </p:txBody>
       </p:sp>
@@ -2697,7 +2675,7 @@
           <a:p>
             <a:fld id="{70F2B8A8-1C9A-4543-B952-67A8D415A7CB}" type="datetimeFigureOut">
               <a:rPr lang="zh-TW" altLang="en-US" smtClean="0"/>
-              <a:t>2022/1/1</a:t>
+              <a:t>2025/9/20</a:t>
             </a:fld>
             <a:endParaRPr lang="zh-TW" altLang="en-US"/>
           </a:p>
@@ -3252,6 +3230,16 @@
               <a:t>正</a:t>
             </a:r>
             <a:r>
+              <a:rPr lang="zh-CN" altLang="en-US" sz="4400" b="1" dirty="0">
+                <a:solidFill>
+                  <a:srgbClr val="660033"/>
+                </a:solidFill>
+                <a:latin typeface="Microsoft JhengHei" panose="020B0604030504040204" pitchFamily="34" charset="-120"/>
+                <a:ea typeface="Microsoft JhengHei" panose="020B0604030504040204" pitchFamily="34" charset="-120"/>
+              </a:rPr>
+              <a:t>歌</a:t>
+            </a:r>
+            <a:r>
               <a:rPr lang="en-US" sz="4400" b="1" dirty="0">
                 <a:solidFill>
                   <a:srgbClr val="660033"/>
@@ -3260,18 +3248,7 @@
                 <a:latin typeface="Microsoft JhengHei" panose="020B0604030504040204" pitchFamily="34" charset="-120"/>
                 <a:ea typeface="Microsoft JhengHei" panose="020B0604030504040204" pitchFamily="34" charset="-120"/>
               </a:rPr>
-              <a:t> </a:t>
-            </a:r>
-            <a:r>
-              <a:rPr lang="en-US" sz="4400" b="1" dirty="0">
-                <a:solidFill>
-                  <a:srgbClr val="660033"/>
-                </a:solidFill>
-                <a:effectLst/>
-                <a:latin typeface="Microsoft JhengHei" panose="020B0604030504040204" pitchFamily="34" charset="-120"/>
-                <a:ea typeface="Microsoft JhengHei" panose="020B0604030504040204" pitchFamily="34" charset="-120"/>
-              </a:rPr>
-              <a:t>)</a:t>
+              <a:t> )</a:t>
             </a:r>
             <a:endParaRPr lang="vi-VN" sz="4400" b="1" dirty="0">
               <a:solidFill>
@@ -3422,7 +3399,6 @@
                 <a:solidFill>
                   <a:srgbClr val="660033"/>
                 </a:solidFill>
-                <a:effectLst/>
                 <a:latin typeface="Microsoft JhengHei" panose="020B0604030504040204" pitchFamily="34" charset="-120"/>
                 <a:ea typeface="Microsoft JhengHei" panose="020B0604030504040204" pitchFamily="34" charset="-120"/>
               </a:rPr>
@@ -3433,39 +3409,25 @@
                 <a:solidFill>
                   <a:srgbClr val="660033"/>
                 </a:solidFill>
-                <a:effectLst/>
                 <a:latin typeface="Microsoft JhengHei" panose="020B0604030504040204" pitchFamily="34" charset="-120"/>
                 <a:ea typeface="Microsoft JhengHei" panose="020B0604030504040204" pitchFamily="34" charset="-120"/>
               </a:rPr>
-              <a:t>正</a:t>
+              <a:t>正歌</a:t>
             </a:r>
             <a:r>
               <a:rPr lang="en-US" sz="4400" b="1" dirty="0">
                 <a:solidFill>
                   <a:srgbClr val="660033"/>
                 </a:solidFill>
-                <a:effectLst/>
                 <a:latin typeface="Microsoft JhengHei" panose="020B0604030504040204" pitchFamily="34" charset="-120"/>
                 <a:ea typeface="Microsoft JhengHei" panose="020B0604030504040204" pitchFamily="34" charset="-120"/>
               </a:rPr>
-              <a:t> </a:t>
-            </a:r>
-            <a:r>
-              <a:rPr lang="en-US" sz="4400" b="1" dirty="0">
-                <a:solidFill>
-                  <a:srgbClr val="660033"/>
-                </a:solidFill>
-                <a:effectLst/>
-                <a:latin typeface="Microsoft JhengHei" panose="020B0604030504040204" pitchFamily="34" charset="-120"/>
-                <a:ea typeface="Microsoft JhengHei" panose="020B0604030504040204" pitchFamily="34" charset="-120"/>
-              </a:rPr>
-              <a:t>)</a:t>
+              <a:t> )</a:t>
             </a:r>
             <a:endParaRPr lang="vi-VN" sz="4400" b="1" dirty="0">
               <a:solidFill>
                 <a:srgbClr val="660033"/>
               </a:solidFill>
-              <a:effectLst/>
               <a:latin typeface="Microsoft JhengHei" panose="020B0604030504040204" pitchFamily="34" charset="-120"/>
               <a:ea typeface="Microsoft JhengHei" panose="020B0604030504040204" pitchFamily="34" charset="-120"/>
             </a:endParaRPr>
@@ -3597,7 +3559,6 @@
                 <a:solidFill>
                   <a:srgbClr val="660033"/>
                 </a:solidFill>
-                <a:effectLst/>
                 <a:latin typeface="Microsoft JhengHei" panose="020B0604030504040204" pitchFamily="34" charset="-120"/>
                 <a:ea typeface="Microsoft JhengHei" panose="020B0604030504040204" pitchFamily="34" charset="-120"/>
               </a:rPr>
@@ -3608,39 +3569,25 @@
                 <a:solidFill>
                   <a:srgbClr val="660033"/>
                 </a:solidFill>
-                <a:effectLst/>
                 <a:latin typeface="Microsoft JhengHei" panose="020B0604030504040204" pitchFamily="34" charset="-120"/>
                 <a:ea typeface="Microsoft JhengHei" panose="020B0604030504040204" pitchFamily="34" charset="-120"/>
               </a:rPr>
-              <a:t>正</a:t>
+              <a:t>正歌</a:t>
             </a:r>
             <a:r>
               <a:rPr lang="en-US" sz="4400" b="1" dirty="0">
                 <a:solidFill>
                   <a:srgbClr val="660033"/>
                 </a:solidFill>
-                <a:effectLst/>
                 <a:latin typeface="Microsoft JhengHei" panose="020B0604030504040204" pitchFamily="34" charset="-120"/>
                 <a:ea typeface="Microsoft JhengHei" panose="020B0604030504040204" pitchFamily="34" charset="-120"/>
               </a:rPr>
-              <a:t> </a:t>
-            </a:r>
-            <a:r>
-              <a:rPr lang="en-US" sz="4400" b="1" dirty="0">
-                <a:solidFill>
-                  <a:srgbClr val="660033"/>
-                </a:solidFill>
-                <a:effectLst/>
-                <a:latin typeface="Microsoft JhengHei" panose="020B0604030504040204" pitchFamily="34" charset="-120"/>
-                <a:ea typeface="Microsoft JhengHei" panose="020B0604030504040204" pitchFamily="34" charset="-120"/>
-              </a:rPr>
-              <a:t>)</a:t>
+              <a:t> )</a:t>
             </a:r>
             <a:endParaRPr lang="vi-VN" sz="4400" b="1" dirty="0">
               <a:solidFill>
                 <a:srgbClr val="660033"/>
               </a:solidFill>
-              <a:effectLst/>
               <a:latin typeface="Microsoft JhengHei" panose="020B0604030504040204" pitchFamily="34" charset="-120"/>
               <a:ea typeface="Microsoft JhengHei" panose="020B0604030504040204" pitchFamily="34" charset="-120"/>
             </a:endParaRPr>
@@ -3772,7 +3719,6 @@
                 <a:solidFill>
                   <a:srgbClr val="660033"/>
                 </a:solidFill>
-                <a:effectLst/>
                 <a:latin typeface="Microsoft JhengHei" panose="020B0604030504040204" pitchFamily="34" charset="-120"/>
                 <a:ea typeface="Microsoft JhengHei" panose="020B0604030504040204" pitchFamily="34" charset="-120"/>
               </a:rPr>
@@ -3783,39 +3729,25 @@
                 <a:solidFill>
                   <a:srgbClr val="660033"/>
                 </a:solidFill>
-                <a:effectLst/>
                 <a:latin typeface="Microsoft JhengHei" panose="020B0604030504040204" pitchFamily="34" charset="-120"/>
                 <a:ea typeface="Microsoft JhengHei" panose="020B0604030504040204" pitchFamily="34" charset="-120"/>
               </a:rPr>
-              <a:t>正</a:t>
+              <a:t>正歌</a:t>
             </a:r>
             <a:r>
               <a:rPr lang="en-US" sz="4400" b="1" dirty="0">
                 <a:solidFill>
                   <a:srgbClr val="660033"/>
                 </a:solidFill>
-                <a:effectLst/>
                 <a:latin typeface="Microsoft JhengHei" panose="020B0604030504040204" pitchFamily="34" charset="-120"/>
                 <a:ea typeface="Microsoft JhengHei" panose="020B0604030504040204" pitchFamily="34" charset="-120"/>
               </a:rPr>
-              <a:t> </a:t>
-            </a:r>
-            <a:r>
-              <a:rPr lang="en-US" sz="4400" b="1" dirty="0">
-                <a:solidFill>
-                  <a:srgbClr val="660033"/>
-                </a:solidFill>
-                <a:effectLst/>
-                <a:latin typeface="Microsoft JhengHei" panose="020B0604030504040204" pitchFamily="34" charset="-120"/>
-                <a:ea typeface="Microsoft JhengHei" panose="020B0604030504040204" pitchFamily="34" charset="-120"/>
-              </a:rPr>
-              <a:t>)</a:t>
+              <a:t> )</a:t>
             </a:r>
             <a:endParaRPr lang="vi-VN" sz="4400" b="1" dirty="0">
               <a:solidFill>
                 <a:srgbClr val="660033"/>
               </a:solidFill>
-              <a:effectLst/>
               <a:latin typeface="Microsoft JhengHei" panose="020B0604030504040204" pitchFamily="34" charset="-120"/>
               <a:ea typeface="Microsoft JhengHei" panose="020B0604030504040204" pitchFamily="34" charset="-120"/>
             </a:endParaRPr>
@@ -3940,7 +3872,6 @@
                 <a:solidFill>
                   <a:srgbClr val="660033"/>
                 </a:solidFill>
-                <a:effectLst/>
                 <a:latin typeface="Microsoft JhengHei" panose="020B0604030504040204" pitchFamily="34" charset="-120"/>
                 <a:ea typeface="Microsoft JhengHei" panose="020B0604030504040204" pitchFamily="34" charset="-120"/>
               </a:rPr>
@@ -3951,39 +3882,25 @@
                 <a:solidFill>
                   <a:srgbClr val="660033"/>
                 </a:solidFill>
-                <a:effectLst/>
                 <a:latin typeface="Microsoft JhengHei" panose="020B0604030504040204" pitchFamily="34" charset="-120"/>
                 <a:ea typeface="Microsoft JhengHei" panose="020B0604030504040204" pitchFamily="34" charset="-120"/>
               </a:rPr>
-              <a:t>正</a:t>
+              <a:t>正歌</a:t>
             </a:r>
             <a:r>
               <a:rPr lang="en-US" sz="4400" b="1" dirty="0">
                 <a:solidFill>
                   <a:srgbClr val="660033"/>
                 </a:solidFill>
-                <a:effectLst/>
                 <a:latin typeface="Microsoft JhengHei" panose="020B0604030504040204" pitchFamily="34" charset="-120"/>
                 <a:ea typeface="Microsoft JhengHei" panose="020B0604030504040204" pitchFamily="34" charset="-120"/>
               </a:rPr>
-              <a:t> </a:t>
-            </a:r>
-            <a:r>
-              <a:rPr lang="en-US" sz="4400" b="1" dirty="0">
-                <a:solidFill>
-                  <a:srgbClr val="660033"/>
-                </a:solidFill>
-                <a:effectLst/>
-                <a:latin typeface="Microsoft JhengHei" panose="020B0604030504040204" pitchFamily="34" charset="-120"/>
-                <a:ea typeface="Microsoft JhengHei" panose="020B0604030504040204" pitchFamily="34" charset="-120"/>
-              </a:rPr>
-              <a:t>)</a:t>
+              <a:t> )</a:t>
             </a:r>
             <a:endParaRPr lang="vi-VN" sz="4400" b="1" dirty="0">
               <a:solidFill>
                 <a:srgbClr val="660033"/>
               </a:solidFill>
-              <a:effectLst/>
               <a:latin typeface="Microsoft JhengHei" panose="020B0604030504040204" pitchFamily="34" charset="-120"/>
               <a:ea typeface="Microsoft JhengHei" panose="020B0604030504040204" pitchFamily="34" charset="-120"/>
             </a:endParaRPr>
@@ -4122,7 +4039,7 @@
               <a:t>( </a:t>
             </a:r>
             <a:r>
-              <a:rPr lang="zh-CN" altLang="en-US" sz="4400" b="1" dirty="0" smtClean="0">
+              <a:rPr lang="zh-CN" altLang="en-US" sz="4400" b="1" dirty="0">
                 <a:solidFill>
                   <a:srgbClr val="660033"/>
                 </a:solidFill>
@@ -4133,7 +4050,17 @@
               <a:t>副</a:t>
             </a:r>
             <a:r>
-              <a:rPr lang="en-US" sz="4400" b="1" dirty="0" smtClean="0">
+              <a:rPr lang="zh-CN" altLang="en-US" sz="4400" b="1" dirty="0">
+                <a:solidFill>
+                  <a:srgbClr val="660033"/>
+                </a:solidFill>
+                <a:latin typeface="Microsoft JhengHei" panose="020B0604030504040204" pitchFamily="34" charset="-120"/>
+                <a:ea typeface="Microsoft JhengHei" panose="020B0604030504040204" pitchFamily="34" charset="-120"/>
+              </a:rPr>
+              <a:t>歌</a:t>
+            </a:r>
+            <a:r>
+              <a:rPr lang="en-US" sz="4400" b="1" dirty="0">
                 <a:solidFill>
                   <a:srgbClr val="660033"/>
                 </a:solidFill>
@@ -4141,18 +4068,7 @@
                 <a:latin typeface="Microsoft JhengHei" panose="020B0604030504040204" pitchFamily="34" charset="-120"/>
                 <a:ea typeface="Microsoft JhengHei" panose="020B0604030504040204" pitchFamily="34" charset="-120"/>
               </a:rPr>
-              <a:t> </a:t>
-            </a:r>
-            <a:r>
-              <a:rPr lang="en-US" sz="4400" b="1" dirty="0">
-                <a:solidFill>
-                  <a:srgbClr val="660033"/>
-                </a:solidFill>
-                <a:effectLst/>
-                <a:latin typeface="Microsoft JhengHei" panose="020B0604030504040204" pitchFamily="34" charset="-120"/>
-                <a:ea typeface="Microsoft JhengHei" panose="020B0604030504040204" pitchFamily="34" charset="-120"/>
-              </a:rPr>
-              <a:t>)</a:t>
+              <a:t> )</a:t>
             </a:r>
             <a:endParaRPr lang="vi-VN" sz="4400" b="1" dirty="0">
               <a:solidFill>
@@ -4290,50 +4206,35 @@
                 <a:solidFill>
                   <a:srgbClr val="660033"/>
                 </a:solidFill>
-                <a:effectLst/>
                 <a:latin typeface="Microsoft JhengHei" panose="020B0604030504040204" pitchFamily="34" charset="-120"/>
                 <a:ea typeface="Microsoft JhengHei" panose="020B0604030504040204" pitchFamily="34" charset="-120"/>
               </a:rPr>
               <a:t>( </a:t>
             </a:r>
             <a:r>
-              <a:rPr lang="zh-CN" altLang="en-US" sz="4400" b="1" dirty="0" smtClean="0">
+              <a:rPr lang="zh-CN" altLang="en-US" sz="4400" b="1" dirty="0">
                 <a:solidFill>
                   <a:srgbClr val="660033"/>
                 </a:solidFill>
-                <a:effectLst/>
                 <a:latin typeface="Microsoft JhengHei" panose="020B0604030504040204" pitchFamily="34" charset="-120"/>
                 <a:ea typeface="Microsoft JhengHei" panose="020B0604030504040204" pitchFamily="34" charset="-120"/>
               </a:rPr>
-              <a:t>副</a:t>
-            </a:r>
-            <a:r>
-              <a:rPr lang="en-US" sz="4400" b="1" dirty="0" smtClean="0">
+              <a:t>副歌</a:t>
+            </a:r>
+            <a:r>
+              <a:rPr lang="en-US" sz="4400" b="1" dirty="0">
                 <a:solidFill>
                   <a:srgbClr val="660033"/>
                 </a:solidFill>
-                <a:effectLst/>
                 <a:latin typeface="Microsoft JhengHei" panose="020B0604030504040204" pitchFamily="34" charset="-120"/>
                 <a:ea typeface="Microsoft JhengHei" panose="020B0604030504040204" pitchFamily="34" charset="-120"/>
               </a:rPr>
-              <a:t> </a:t>
-            </a:r>
-            <a:r>
-              <a:rPr lang="en-US" sz="4400" b="1" dirty="0">
-                <a:solidFill>
-                  <a:srgbClr val="660033"/>
-                </a:solidFill>
-                <a:effectLst/>
-                <a:latin typeface="Microsoft JhengHei" panose="020B0604030504040204" pitchFamily="34" charset="-120"/>
-                <a:ea typeface="Microsoft JhengHei" panose="020B0604030504040204" pitchFamily="34" charset="-120"/>
-              </a:rPr>
-              <a:t>)</a:t>
+              <a:t> )</a:t>
             </a:r>
             <a:endParaRPr lang="vi-VN" sz="4400" b="1" dirty="0">
               <a:solidFill>
                 <a:srgbClr val="660033"/>
               </a:solidFill>
-              <a:effectLst/>
               <a:latin typeface="Microsoft JhengHei" panose="020B0604030504040204" pitchFamily="34" charset="-120"/>
               <a:ea typeface="Microsoft JhengHei" panose="020B0604030504040204" pitchFamily="34" charset="-120"/>
             </a:endParaRPr>
